--- a/02/ppt/02-1_개발_도구_설치와_확인_v2.pptx
+++ b/02/ppt/02-1_개발_도구_설치와_확인_v2.pptx
@@ -3380,6 +3380,10 @@
             <a:prstDash val="solid"/>
           </a:ln>
         </p:spPr>
+        <p:txBody xmlns:a="http://schemas.openxmlformats.org/drawingml/2006/main">
+          <a:bodyPr/>
+          <a:p/>
+        </p:txBody>
       </p:sp>
       <p:sp>
         <p:nvSpPr>
@@ -3597,6 +3601,10 @@
             <a:prstDash val="solid"/>
           </a:ln>
         </p:spPr>
+        <p:txBody xmlns:a="http://schemas.openxmlformats.org/drawingml/2006/main">
+          <a:bodyPr/>
+          <a:p/>
+        </p:txBody>
       </p:sp>
       <p:sp>
         <p:nvSpPr>
@@ -3847,6 +3855,10 @@
             <a:prstDash val="solid"/>
           </a:ln>
         </p:spPr>
+        <p:txBody xmlns:a="http://schemas.openxmlformats.org/drawingml/2006/main">
+          <a:bodyPr/>
+          <a:p/>
+        </p:txBody>
       </p:sp>
       <p:sp>
         <p:nvSpPr>
@@ -4002,6 +4014,10 @@
             <a:prstDash val="solid"/>
           </a:ln>
         </p:spPr>
+        <p:txBody xmlns:a="http://schemas.openxmlformats.org/drawingml/2006/main">
+          <a:bodyPr/>
+          <a:p/>
+        </p:txBody>
       </p:sp>
       <p:sp>
         <p:nvSpPr>
@@ -4099,6 +4115,10 @@
             <a:prstDash val="solid"/>
           </a:ln>
         </p:spPr>
+        <p:txBody xmlns:a="http://schemas.openxmlformats.org/drawingml/2006/main">
+          <a:bodyPr/>
+          <a:p/>
+        </p:txBody>
       </p:sp>
       <p:sp>
         <p:nvSpPr>
@@ -4254,6 +4274,10 @@
             <a:prstDash val="solid"/>
           </a:ln>
         </p:spPr>
+        <p:txBody xmlns:a="http://schemas.openxmlformats.org/drawingml/2006/main">
+          <a:bodyPr/>
+          <a:p/>
+        </p:txBody>
       </p:sp>
       <p:sp>
         <p:nvSpPr>
@@ -4498,7 +4522,7 @@
                 <a:ea typeface="IBM Plex Sans KR"/>
                 <a:cs typeface="IBM Plex Sans KR"/>
               </a:rPr>
-              <a:t>교과서 02-1 · 7쪽</a:t>
+              <a:t>교과서 02-1 · 8쪽</a:t>
             </a:r>
           </a:p>
         </p:txBody>
@@ -4655,6 +4679,10 @@
             <a:prstDash val="solid"/>
           </a:ln>
         </p:spPr>
+        <p:txBody xmlns:a="http://schemas.openxmlformats.org/drawingml/2006/main">
+          <a:bodyPr/>
+          <a:p/>
+        </p:txBody>
       </p:sp>
       <p:sp>
         <p:nvSpPr>
@@ -4810,6 +4838,10 @@
             <a:prstDash val="solid"/>
           </a:ln>
         </p:spPr>
+        <p:txBody xmlns:a="http://schemas.openxmlformats.org/drawingml/2006/main">
+          <a:bodyPr/>
+          <a:p/>
+        </p:txBody>
       </p:sp>
       <p:sp>
         <p:nvSpPr>
@@ -4907,6 +4939,10 @@
             <a:prstDash val="solid"/>
           </a:ln>
         </p:spPr>
+        <p:txBody xmlns:a="http://schemas.openxmlformats.org/drawingml/2006/main">
+          <a:bodyPr/>
+          <a:p/>
+        </p:txBody>
       </p:sp>
       <p:sp>
         <p:nvSpPr>
@@ -5062,6 +5098,10 @@
             <a:prstDash val="solid"/>
           </a:ln>
         </p:spPr>
+        <p:txBody xmlns:a="http://schemas.openxmlformats.org/drawingml/2006/main">
+          <a:bodyPr/>
+          <a:p/>
+        </p:txBody>
       </p:sp>
       <p:sp>
         <p:nvSpPr>
@@ -5360,7 +5400,7 @@
                 <a:ea typeface="IBM Plex Sans KR"/>
                 <a:cs typeface="IBM Plex Sans KR"/>
               </a:rPr>
-              <a:t>교과서 02-1 · 7쪽</a:t>
+              <a:t>교과서 02-1 · 8쪽</a:t>
             </a:r>
           </a:p>
         </p:txBody>
@@ -5517,6 +5557,10 @@
             <a:prstDash val="solid"/>
           </a:ln>
         </p:spPr>
+        <p:txBody xmlns:a="http://schemas.openxmlformats.org/drawingml/2006/main">
+          <a:bodyPr/>
+          <a:p/>
+        </p:txBody>
       </p:sp>
       <p:sp>
         <p:nvSpPr>
@@ -5672,6 +5716,10 @@
             <a:prstDash val="solid"/>
           </a:ln>
         </p:spPr>
+        <p:txBody xmlns:a="http://schemas.openxmlformats.org/drawingml/2006/main">
+          <a:bodyPr/>
+          <a:p/>
+        </p:txBody>
       </p:sp>
       <p:sp>
         <p:nvSpPr>
@@ -5769,6 +5817,10 @@
             <a:prstDash val="solid"/>
           </a:ln>
         </p:spPr>
+        <p:txBody xmlns:a="http://schemas.openxmlformats.org/drawingml/2006/main">
+          <a:bodyPr/>
+          <a:p/>
+        </p:txBody>
       </p:sp>
       <p:sp>
         <p:nvSpPr>
@@ -5924,6 +5976,10 @@
             <a:prstDash val="solid"/>
           </a:ln>
         </p:spPr>
+        <p:txBody xmlns:a="http://schemas.openxmlformats.org/drawingml/2006/main">
+          <a:bodyPr/>
+          <a:p/>
+        </p:txBody>
       </p:sp>
       <p:sp>
         <p:nvSpPr>
@@ -6168,7 +6224,7 @@
                 <a:ea typeface="IBM Plex Sans KR"/>
                 <a:cs typeface="IBM Plex Sans KR"/>
               </a:rPr>
-              <a:t>교과서 02-1 · 8쪽</a:t>
+              <a:t>교과서 02-1 · 9쪽</a:t>
             </a:r>
           </a:p>
         </p:txBody>
@@ -6325,6 +6381,10 @@
             <a:prstDash val="solid"/>
           </a:ln>
         </p:spPr>
+        <p:txBody xmlns:a="http://schemas.openxmlformats.org/drawingml/2006/main">
+          <a:bodyPr/>
+          <a:p/>
+        </p:txBody>
       </p:sp>
       <p:sp>
         <p:nvSpPr>
@@ -6480,6 +6540,10 @@
             <a:prstDash val="solid"/>
           </a:ln>
         </p:spPr>
+        <p:txBody xmlns:a="http://schemas.openxmlformats.org/drawingml/2006/main">
+          <a:bodyPr/>
+          <a:p/>
+        </p:txBody>
       </p:sp>
       <p:sp>
         <p:nvSpPr>
@@ -6577,6 +6641,10 @@
             <a:prstDash val="solid"/>
           </a:ln>
         </p:spPr>
+        <p:txBody xmlns:a="http://schemas.openxmlformats.org/drawingml/2006/main">
+          <a:bodyPr/>
+          <a:p/>
+        </p:txBody>
       </p:sp>
       <p:sp>
         <p:nvSpPr>
@@ -6759,6 +6827,10 @@
             <a:prstDash val="solid"/>
           </a:ln>
         </p:spPr>
+        <p:txBody xmlns:a="http://schemas.openxmlformats.org/drawingml/2006/main">
+          <a:bodyPr/>
+          <a:p/>
+        </p:txBody>
       </p:sp>
       <p:sp>
         <p:nvSpPr>
@@ -7003,7 +7075,7 @@
                 <a:ea typeface="IBM Plex Sans KR"/>
                 <a:cs typeface="IBM Plex Sans KR"/>
               </a:rPr>
-              <a:t>교과서 02-1 · 8쪽</a:t>
+              <a:t>교과서 02-1 · 9쪽</a:t>
             </a:r>
           </a:p>
         </p:txBody>
@@ -7160,6 +7232,10 @@
             <a:prstDash val="solid"/>
           </a:ln>
         </p:spPr>
+        <p:txBody xmlns:a="http://schemas.openxmlformats.org/drawingml/2006/main">
+          <a:bodyPr/>
+          <a:p/>
+        </p:txBody>
       </p:sp>
       <p:sp>
         <p:nvSpPr>
@@ -7315,6 +7391,10 @@
             <a:prstDash val="solid"/>
           </a:ln>
         </p:spPr>
+        <p:txBody xmlns:a="http://schemas.openxmlformats.org/drawingml/2006/main">
+          <a:bodyPr/>
+          <a:p/>
+        </p:txBody>
       </p:sp>
       <p:sp>
         <p:nvSpPr>
@@ -7412,6 +7492,10 @@
             <a:prstDash val="solid"/>
           </a:ln>
         </p:spPr>
+        <p:txBody xmlns:a="http://schemas.openxmlformats.org/drawingml/2006/main">
+          <a:bodyPr/>
+          <a:p/>
+        </p:txBody>
       </p:sp>
       <p:sp>
         <p:nvSpPr>
@@ -7567,6 +7651,10 @@
             <a:prstDash val="solid"/>
           </a:ln>
         </p:spPr>
+        <p:txBody xmlns:a="http://schemas.openxmlformats.org/drawingml/2006/main">
+          <a:bodyPr/>
+          <a:p/>
+        </p:txBody>
       </p:sp>
       <p:sp>
         <p:nvSpPr>
@@ -7811,7 +7899,7 @@
                 <a:ea typeface="IBM Plex Sans KR"/>
                 <a:cs typeface="IBM Plex Sans KR"/>
               </a:rPr>
-              <a:t>교과서 02-1 · 9쪽</a:t>
+              <a:t>교과서 02-1 · 10쪽</a:t>
             </a:r>
           </a:p>
         </p:txBody>
@@ -7966,6 +8054,10 @@
             <a:prstDash val="solid"/>
           </a:ln>
         </p:spPr>
+        <p:txBody xmlns:a="http://schemas.openxmlformats.org/drawingml/2006/main">
+          <a:bodyPr/>
+          <a:p/>
+        </p:txBody>
       </p:sp>
       <p:sp>
         <p:nvSpPr>
@@ -8086,7 +8178,7 @@
                 <a:ea typeface="IBM Plex Sans KR"/>
                 <a:cs typeface="IBM Plex Sans KR"/>
               </a:rPr>
-              <a:t>오류가 난 학생만 교과서 10쪽을 따라 합니다</a:t>
+              <a:t>오류가 난 학생만 교과서 11쪽을 따라 합니다</a:t>
             </a:r>
           </a:p>
         </p:txBody>
@@ -8121,6 +8213,10 @@
             <a:prstDash val="solid"/>
           </a:ln>
         </p:spPr>
+        <p:txBody xmlns:a="http://schemas.openxmlformats.org/drawingml/2006/main">
+          <a:bodyPr/>
+          <a:p/>
+        </p:txBody>
       </p:sp>
       <p:sp>
         <p:nvSpPr>
@@ -8218,6 +8314,10 @@
             <a:prstDash val="solid"/>
           </a:ln>
         </p:spPr>
+        <p:txBody xmlns:a="http://schemas.openxmlformats.org/drawingml/2006/main">
+          <a:bodyPr/>
+          <a:p/>
+        </p:txBody>
       </p:sp>
       <p:sp>
         <p:nvSpPr>
@@ -8253,6 +8353,10 @@
             <a:prstDash val="solid"/>
           </a:ln>
         </p:spPr>
+        <p:txBody xmlns:a="http://schemas.openxmlformats.org/drawingml/2006/main">
+          <a:bodyPr/>
+          <a:p/>
+        </p:txBody>
       </p:sp>
       <p:sp>
         <p:nvSpPr>
@@ -8476,6 +8580,10 @@
             <a:prstDash val="solid"/>
           </a:ln>
         </p:spPr>
+        <p:txBody xmlns:a="http://schemas.openxmlformats.org/drawingml/2006/main">
+          <a:bodyPr/>
+          <a:p/>
+        </p:txBody>
       </p:sp>
       <p:sp>
         <p:nvSpPr>
@@ -8511,6 +8619,10 @@
             <a:prstDash val="solid"/>
           </a:ln>
         </p:spPr>
+        <p:txBody xmlns:a="http://schemas.openxmlformats.org/drawingml/2006/main">
+          <a:bodyPr/>
+          <a:p/>
+        </p:txBody>
       </p:sp>
       <p:sp>
         <p:nvSpPr>
@@ -8693,7 +8805,7 @@
                 <a:ea typeface="IBM Plex Sans KR"/>
                 <a:cs typeface="IBM Plex Sans KR"/>
               </a:rPr>
-              <a:t>교과서 10쪽의 ‘중복 방지 PATH 명령’을 복사합니다.</a:t>
+              <a:t>교과서 11쪽의 ‘중복 방지 PATH 명령’을 복사합니다.</a:t>
             </a:r>
           </a:p>
           <a:p xmlns:a="http://schemas.openxmlformats.org/drawingml/2006/main">
@@ -8786,6 +8898,10 @@
             <a:prstDash val="solid"/>
           </a:ln>
         </p:spPr>
+        <p:txBody xmlns:a="http://schemas.openxmlformats.org/drawingml/2006/main">
+          <a:bodyPr/>
+          <a:p/>
+        </p:txBody>
       </p:sp>
       <p:sp>
         <p:nvSpPr>
@@ -8821,6 +8937,10 @@
             <a:prstDash val="solid"/>
           </a:ln>
         </p:spPr>
+        <p:txBody xmlns:a="http://schemas.openxmlformats.org/drawingml/2006/main">
+          <a:bodyPr/>
+          <a:p/>
+        </p:txBody>
       </p:sp>
       <p:sp>
         <p:nvSpPr>
@@ -9067,7 +9187,7 @@
                 <a:ea typeface="IBM Plex Sans KR"/>
                 <a:cs typeface="IBM Plex Sans KR"/>
               </a:rPr>
-              <a:t>‘running scripts is disabled’는 다른 오류  ·  교과서 11쪽</a:t>
+              <a:t>‘running scripts is disabled’는 다른 오류  ·  교과서 12쪽</a:t>
             </a:r>
           </a:p>
         </p:txBody>
@@ -9129,7 +9249,7 @@
                 <a:ea typeface="IBM Plex Sans KR"/>
                 <a:cs typeface="IBM Plex Sans KR"/>
               </a:rPr>
-              <a:t>교과서 02-1 · 10쪽</a:t>
+              <a:t>교과서 02-1 · 11–12쪽</a:t>
             </a:r>
           </a:p>
         </p:txBody>
@@ -9259,6 +9379,10 @@
             <a:prstDash val="solid"/>
           </a:ln>
         </p:spPr>
+        <p:txBody xmlns:a="http://schemas.openxmlformats.org/drawingml/2006/main">
+          <a:bodyPr/>
+          <a:p/>
+        </p:txBody>
       </p:sp>
       <p:sp>
         <p:nvSpPr>
@@ -9414,6 +9538,10 @@
             <a:prstDash val="solid"/>
           </a:ln>
         </p:spPr>
+        <p:txBody xmlns:a="http://schemas.openxmlformats.org/drawingml/2006/main">
+          <a:bodyPr/>
+          <a:p/>
+        </p:txBody>
       </p:sp>
       <p:sp>
         <p:nvSpPr>
@@ -9511,6 +9639,10 @@
             <a:prstDash val="solid"/>
           </a:ln>
         </p:spPr>
+        <p:txBody xmlns:a="http://schemas.openxmlformats.org/drawingml/2006/main">
+          <a:bodyPr/>
+          <a:p/>
+        </p:txBody>
       </p:sp>
       <p:sp>
         <p:nvSpPr>
@@ -9666,6 +9798,10 @@
             <a:prstDash val="solid"/>
           </a:ln>
         </p:spPr>
+        <p:txBody xmlns:a="http://schemas.openxmlformats.org/drawingml/2006/main">
+          <a:bodyPr/>
+          <a:p/>
+        </p:txBody>
       </p:sp>
       <p:sp>
         <p:nvSpPr>
@@ -9910,7 +10046,7 @@
                 <a:ea typeface="IBM Plex Sans KR"/>
                 <a:cs typeface="IBM Plex Sans KR"/>
               </a:rPr>
-              <a:t>교과서 02-1 · 12쪽</a:t>
+              <a:t>교과서 02-1 · 13쪽</a:t>
             </a:r>
           </a:p>
         </p:txBody>
@@ -10067,6 +10203,10 @@
             <a:prstDash val="solid"/>
           </a:ln>
         </p:spPr>
+        <p:txBody xmlns:a="http://schemas.openxmlformats.org/drawingml/2006/main">
+          <a:bodyPr/>
+          <a:p/>
+        </p:txBody>
       </p:sp>
       <p:sp>
         <p:nvSpPr>
@@ -10222,6 +10362,10 @@
             <a:prstDash val="solid"/>
           </a:ln>
         </p:spPr>
+        <p:txBody xmlns:a="http://schemas.openxmlformats.org/drawingml/2006/main">
+          <a:bodyPr/>
+          <a:p/>
+        </p:txBody>
       </p:sp>
       <p:sp>
         <p:nvSpPr>
@@ -10315,6 +10459,10 @@
             <a:prstDash val="solid"/>
           </a:ln>
         </p:spPr>
+        <p:txBody xmlns:a="http://schemas.openxmlformats.org/drawingml/2006/main">
+          <a:bodyPr/>
+          <a:p/>
+        </p:txBody>
       </p:sp>
       <p:sp>
         <p:nvSpPr>
@@ -10497,6 +10645,10 @@
             <a:prstDash val="solid"/>
           </a:ln>
         </p:spPr>
+        <p:txBody xmlns:a="http://schemas.openxmlformats.org/drawingml/2006/main">
+          <a:bodyPr/>
+          <a:p/>
+        </p:txBody>
       </p:sp>
       <p:sp>
         <p:nvSpPr>
@@ -10768,7 +10920,7 @@
                 <a:ea typeface="IBM Plex Sans KR"/>
                 <a:cs typeface="IBM Plex Sans KR"/>
               </a:rPr>
-              <a:t>교과서 02-1 · 13쪽</a:t>
+              <a:t>교과서 02-1 · 14쪽</a:t>
             </a:r>
           </a:p>
         </p:txBody>
@@ -10925,6 +11077,10 @@
             <a:prstDash val="solid"/>
           </a:ln>
         </p:spPr>
+        <p:txBody xmlns:a="http://schemas.openxmlformats.org/drawingml/2006/main">
+          <a:bodyPr/>
+          <a:p/>
+        </p:txBody>
       </p:sp>
       <p:sp>
         <p:nvSpPr>
@@ -11080,6 +11236,10 @@
             <a:prstDash val="solid"/>
           </a:ln>
         </p:spPr>
+        <p:txBody xmlns:a="http://schemas.openxmlformats.org/drawingml/2006/main">
+          <a:bodyPr/>
+          <a:p/>
+        </p:txBody>
       </p:sp>
       <p:sp>
         <p:nvSpPr>
@@ -11177,6 +11337,10 @@
             <a:prstDash val="solid"/>
           </a:ln>
         </p:spPr>
+        <p:txBody xmlns:a="http://schemas.openxmlformats.org/drawingml/2006/main">
+          <a:bodyPr/>
+          <a:p/>
+        </p:txBody>
       </p:sp>
       <p:sp>
         <p:nvSpPr>
@@ -11332,6 +11496,10 @@
             <a:prstDash val="solid"/>
           </a:ln>
         </p:spPr>
+        <p:txBody xmlns:a="http://schemas.openxmlformats.org/drawingml/2006/main">
+          <a:bodyPr/>
+          <a:p/>
+        </p:txBody>
       </p:sp>
       <p:sp>
         <p:nvSpPr>
@@ -11576,7 +11744,7 @@
                 <a:ea typeface="IBM Plex Sans KR"/>
                 <a:cs typeface="IBM Plex Sans KR"/>
               </a:rPr>
-              <a:t>교과서 02-1 · 14쪽</a:t>
+              <a:t>교과서 02-1 · 15쪽</a:t>
             </a:r>
           </a:p>
         </p:txBody>
@@ -11733,6 +11901,10 @@
             <a:prstDash val="solid"/>
           </a:ln>
         </p:spPr>
+        <p:txBody xmlns:a="http://schemas.openxmlformats.org/drawingml/2006/main">
+          <a:bodyPr/>
+          <a:p/>
+        </p:txBody>
       </p:sp>
       <p:sp>
         <p:nvSpPr>
@@ -11888,6 +12060,10 @@
             <a:prstDash val="solid"/>
           </a:ln>
         </p:spPr>
+        <p:txBody xmlns:a="http://schemas.openxmlformats.org/drawingml/2006/main">
+          <a:bodyPr/>
+          <a:p/>
+        </p:txBody>
       </p:sp>
       <p:sp>
         <p:nvSpPr>
@@ -11985,6 +12161,10 @@
             <a:prstDash val="solid"/>
           </a:ln>
         </p:spPr>
+        <p:txBody xmlns:a="http://schemas.openxmlformats.org/drawingml/2006/main">
+          <a:bodyPr/>
+          <a:p/>
+        </p:txBody>
       </p:sp>
       <p:sp>
         <p:nvSpPr>
@@ -12140,6 +12320,10 @@
             <a:prstDash val="solid"/>
           </a:ln>
         </p:spPr>
+        <p:txBody xmlns:a="http://schemas.openxmlformats.org/drawingml/2006/main">
+          <a:bodyPr/>
+          <a:p/>
+        </p:txBody>
       </p:sp>
       <p:sp>
         <p:nvSpPr>
@@ -12438,7 +12622,7 @@
                 <a:ea typeface="IBM Plex Sans KR"/>
                 <a:cs typeface="IBM Plex Sans KR"/>
               </a:rPr>
-              <a:t>교과서 02-1 · 14쪽</a:t>
+              <a:t>교과서 02-1 · 15쪽</a:t>
             </a:r>
           </a:p>
         </p:txBody>
@@ -12595,6 +12779,10 @@
             <a:prstDash val="solid"/>
           </a:ln>
         </p:spPr>
+        <p:txBody xmlns:a="http://schemas.openxmlformats.org/drawingml/2006/main">
+          <a:bodyPr/>
+          <a:p/>
+        </p:txBody>
       </p:sp>
       <p:sp>
         <p:nvSpPr>
@@ -12750,6 +12938,10 @@
             <a:prstDash val="solid"/>
           </a:ln>
         </p:spPr>
+        <p:txBody xmlns:a="http://schemas.openxmlformats.org/drawingml/2006/main">
+          <a:bodyPr/>
+          <a:p/>
+        </p:txBody>
       </p:sp>
       <p:sp>
         <p:nvSpPr>
@@ -13168,6 +13360,10 @@
             <a:prstDash val="solid"/>
           </a:ln>
         </p:spPr>
+        <p:txBody xmlns:a="http://schemas.openxmlformats.org/drawingml/2006/main">
+          <a:bodyPr/>
+          <a:p/>
+        </p:txBody>
       </p:sp>
       <p:sp>
         <p:nvSpPr>
@@ -13323,6 +13519,10 @@
             <a:prstDash val="solid"/>
           </a:ln>
         </p:spPr>
+        <p:txBody xmlns:a="http://schemas.openxmlformats.org/drawingml/2006/main">
+          <a:bodyPr/>
+          <a:p/>
+        </p:txBody>
       </p:sp>
       <p:sp>
         <p:nvSpPr>
@@ -13420,6 +13620,10 @@
             <a:prstDash val="solid"/>
           </a:ln>
         </p:spPr>
+        <p:txBody xmlns:a="http://schemas.openxmlformats.org/drawingml/2006/main">
+          <a:bodyPr/>
+          <a:p/>
+        </p:txBody>
       </p:sp>
       <p:sp>
         <p:nvSpPr>
@@ -13455,6 +13659,10 @@
             <a:prstDash val="solid"/>
           </a:ln>
         </p:spPr>
+        <p:txBody xmlns:a="http://schemas.openxmlformats.org/drawingml/2006/main">
+          <a:bodyPr/>
+          <a:p/>
+        </p:txBody>
       </p:sp>
       <p:sp>
         <p:nvSpPr>
@@ -13676,6 +13884,10 @@
             <a:prstDash val="solid"/>
           </a:ln>
         </p:spPr>
+        <p:txBody xmlns:a="http://schemas.openxmlformats.org/drawingml/2006/main">
+          <a:bodyPr/>
+          <a:p/>
+        </p:txBody>
       </p:sp>
       <p:sp>
         <p:nvSpPr>
@@ -13711,6 +13923,10 @@
             <a:prstDash val="solid"/>
           </a:ln>
         </p:spPr>
+        <p:txBody xmlns:a="http://schemas.openxmlformats.org/drawingml/2006/main">
+          <a:bodyPr/>
+          <a:p/>
+        </p:txBody>
       </p:sp>
       <p:sp>
         <p:nvSpPr>
@@ -13932,6 +14148,10 @@
             <a:prstDash val="solid"/>
           </a:ln>
         </p:spPr>
+        <p:txBody xmlns:a="http://schemas.openxmlformats.org/drawingml/2006/main">
+          <a:bodyPr/>
+          <a:p/>
+        </p:txBody>
       </p:sp>
       <p:sp>
         <p:nvSpPr>
@@ -13967,6 +14187,10 @@
             <a:prstDash val="solid"/>
           </a:ln>
         </p:spPr>
+        <p:txBody xmlns:a="http://schemas.openxmlformats.org/drawingml/2006/main">
+          <a:bodyPr/>
+          <a:p/>
+        </p:txBody>
       </p:sp>
       <p:sp>
         <p:nvSpPr>
@@ -14211,7 +14435,7 @@
                 <a:ea typeface="IBM Plex Sans KR"/>
                 <a:cs typeface="IBM Plex Sans KR"/>
               </a:rPr>
-              <a:t>교과서 02-1 · 15쪽</a:t>
+              <a:t>교과서 02-1 · 16쪽</a:t>
             </a:r>
           </a:p>
         </p:txBody>
@@ -14341,6 +14565,10 @@
             <a:prstDash val="solid"/>
           </a:ln>
         </p:spPr>
+        <p:txBody xmlns:a="http://schemas.openxmlformats.org/drawingml/2006/main">
+          <a:bodyPr/>
+          <a:p/>
+        </p:txBody>
       </p:sp>
       <p:sp>
         <p:nvSpPr>
@@ -14496,6 +14724,10 @@
             <a:prstDash val="solid"/>
           </a:ln>
         </p:spPr>
+        <p:txBody xmlns:a="http://schemas.openxmlformats.org/drawingml/2006/main">
+          <a:bodyPr/>
+          <a:p/>
+        </p:txBody>
       </p:sp>
       <p:sp>
         <p:nvSpPr>
@@ -14616,7 +14848,7 @@
                 <a:ea typeface="IBM Plex Sans KR"/>
                 <a:cs typeface="IBM Plex Sans KR"/>
               </a:rPr>
-              <a:t>교과서 02-1 · 15쪽</a:t>
+              <a:t>교과서 02-1 · 16쪽</a:t>
             </a:r>
           </a:p>
         </p:txBody>
@@ -14679,6 +14911,10 @@
             <a:prstDash val="solid"/>
           </a:ln>
         </p:spPr>
+        <p:txBody xmlns:a="http://schemas.openxmlformats.org/drawingml/2006/main">
+          <a:bodyPr/>
+          <a:p/>
+        </p:txBody>
       </p:sp>
       <p:sp>
         <p:nvSpPr>
@@ -15057,6 +15293,10 @@
             <a:prstDash val="solid"/>
           </a:ln>
         </p:spPr>
+        <p:txBody xmlns:a="http://schemas.openxmlformats.org/drawingml/2006/main">
+          <a:bodyPr/>
+          <a:p/>
+        </p:txBody>
       </p:sp>
       <p:sp>
         <p:nvSpPr>
@@ -15212,6 +15452,10 @@
             <a:prstDash val="solid"/>
           </a:ln>
         </p:spPr>
+        <p:txBody xmlns:a="http://schemas.openxmlformats.org/drawingml/2006/main">
+          <a:bodyPr/>
+          <a:p/>
+        </p:txBody>
       </p:sp>
       <p:sp>
         <p:nvSpPr>
@@ -15332,7 +15576,7 @@
                 <a:ea typeface="IBM Plex Sans KR"/>
                 <a:cs typeface="IBM Plex Sans KR"/>
               </a:rPr>
-              <a:t>교과서 02-1 · 16쪽</a:t>
+              <a:t>교과서 02-1 · 17쪽</a:t>
             </a:r>
           </a:p>
         </p:txBody>
@@ -15590,6 +15834,10 @@
             <a:prstDash val="solid"/>
           </a:ln>
         </p:spPr>
+        <p:txBody xmlns:a="http://schemas.openxmlformats.org/drawingml/2006/main">
+          <a:bodyPr/>
+          <a:p/>
+        </p:txBody>
       </p:sp>
       <p:sp>
         <p:nvSpPr>
@@ -15803,6 +16051,10 @@
             <a:prstDash val="solid"/>
           </a:ln>
         </p:spPr>
+        <p:txBody xmlns:a="http://schemas.openxmlformats.org/drawingml/2006/main">
+          <a:bodyPr/>
+          <a:p/>
+        </p:txBody>
       </p:sp>
       <p:sp>
         <p:nvSpPr>
@@ -15958,6 +16210,10 @@
             <a:prstDash val="solid"/>
           </a:ln>
         </p:spPr>
+        <p:txBody xmlns:a="http://schemas.openxmlformats.org/drawingml/2006/main">
+          <a:bodyPr/>
+          <a:p/>
+        </p:txBody>
       </p:sp>
       <p:sp>
         <p:nvSpPr>
@@ -16078,7 +16334,7 @@
                 <a:ea typeface="IBM Plex Sans KR"/>
                 <a:cs typeface="IBM Plex Sans KR"/>
               </a:rPr>
-              <a:t>교과서 02-1 · 16쪽</a:t>
+              <a:t>교과서 02-1 · 17쪽</a:t>
             </a:r>
           </a:p>
         </p:txBody>
@@ -16139,6 +16395,10 @@
             <a:prstDash val="solid"/>
           </a:ln>
         </p:spPr>
+        <p:txBody xmlns:a="http://schemas.openxmlformats.org/drawingml/2006/main">
+          <a:bodyPr/>
+          <a:p/>
+        </p:txBody>
       </p:sp>
       <p:sp>
         <p:nvSpPr>
@@ -16493,6 +16753,10 @@
             <a:prstDash val="solid"/>
           </a:ln>
         </p:spPr>
+        <p:txBody xmlns:a="http://schemas.openxmlformats.org/drawingml/2006/main">
+          <a:bodyPr/>
+          <a:p/>
+        </p:txBody>
       </p:sp>
       <p:sp>
         <p:nvSpPr>
@@ -16648,6 +16912,10 @@
             <a:prstDash val="solid"/>
           </a:ln>
         </p:spPr>
+        <p:txBody xmlns:a="http://schemas.openxmlformats.org/drawingml/2006/main">
+          <a:bodyPr/>
+          <a:p/>
+        </p:txBody>
       </p:sp>
       <p:sp>
         <p:nvSpPr>
@@ -16745,6 +17013,10 @@
             <a:prstDash val="solid"/>
           </a:ln>
         </p:spPr>
+        <p:txBody xmlns:a="http://schemas.openxmlformats.org/drawingml/2006/main">
+          <a:bodyPr/>
+          <a:p/>
+        </p:txBody>
       </p:sp>
       <p:sp>
         <p:nvSpPr>
@@ -16780,6 +17052,10 @@
             <a:prstDash val="solid"/>
           </a:ln>
         </p:spPr>
+        <p:txBody xmlns:a="http://schemas.openxmlformats.org/drawingml/2006/main">
+          <a:bodyPr/>
+          <a:p/>
+        </p:txBody>
       </p:sp>
       <p:sp>
         <p:nvSpPr>
@@ -17001,6 +17277,10 @@
             <a:prstDash val="solid"/>
           </a:ln>
         </p:spPr>
+        <p:txBody xmlns:a="http://schemas.openxmlformats.org/drawingml/2006/main">
+          <a:bodyPr/>
+          <a:p/>
+        </p:txBody>
       </p:sp>
       <p:sp>
         <p:nvSpPr>
@@ -17036,6 +17316,10 @@
             <a:prstDash val="solid"/>
           </a:ln>
         </p:spPr>
+        <p:txBody xmlns:a="http://schemas.openxmlformats.org/drawingml/2006/main">
+          <a:bodyPr/>
+          <a:p/>
+        </p:txBody>
       </p:sp>
       <p:sp>
         <p:nvSpPr>
@@ -17257,6 +17541,10 @@
             <a:prstDash val="solid"/>
           </a:ln>
         </p:spPr>
+        <p:txBody xmlns:a="http://schemas.openxmlformats.org/drawingml/2006/main">
+          <a:bodyPr/>
+          <a:p/>
+        </p:txBody>
       </p:sp>
       <p:sp>
         <p:nvSpPr>
@@ -17292,6 +17580,10 @@
             <a:prstDash val="solid"/>
           </a:ln>
         </p:spPr>
+        <p:txBody xmlns:a="http://schemas.openxmlformats.org/drawingml/2006/main">
+          <a:bodyPr/>
+          <a:p/>
+        </p:txBody>
       </p:sp>
       <p:sp>
         <p:nvSpPr>
@@ -17598,7 +17890,7 @@
                 <a:ea typeface="IBM Plex Sans KR"/>
                 <a:cs typeface="IBM Plex Sans KR"/>
               </a:rPr>
-              <a:t>교과서 02-1 · 17쪽</a:t>
+              <a:t>교과서 02-1 · 18쪽</a:t>
             </a:r>
           </a:p>
         </p:txBody>
@@ -17728,6 +18020,10 @@
             <a:prstDash val="solid"/>
           </a:ln>
         </p:spPr>
+        <p:txBody xmlns:a="http://schemas.openxmlformats.org/drawingml/2006/main">
+          <a:bodyPr/>
+          <a:p/>
+        </p:txBody>
       </p:sp>
       <p:sp>
         <p:nvSpPr>
@@ -17883,6 +18179,10 @@
             <a:prstDash val="solid"/>
           </a:ln>
         </p:spPr>
+        <p:txBody xmlns:a="http://schemas.openxmlformats.org/drawingml/2006/main">
+          <a:bodyPr/>
+          <a:p/>
+        </p:txBody>
       </p:sp>
       <p:sp>
         <p:nvSpPr>
@@ -17980,6 +18280,10 @@
             <a:prstDash val="solid"/>
           </a:ln>
         </p:spPr>
+        <p:txBody xmlns:a="http://schemas.openxmlformats.org/drawingml/2006/main">
+          <a:bodyPr/>
+          <a:p/>
+        </p:txBody>
       </p:sp>
       <p:sp>
         <p:nvSpPr>
@@ -18658,7 +18962,7 @@
                 <a:ea typeface="IBM Plex Sans KR"/>
                 <a:cs typeface="IBM Plex Sans KR"/>
               </a:rPr>
-              <a:t>교과서 02-1 · 18쪽</a:t>
+              <a:t>교과서 02-1 · 19쪽</a:t>
             </a:r>
           </a:p>
         </p:txBody>
@@ -18788,6 +19092,10 @@
             <a:prstDash val="solid"/>
           </a:ln>
         </p:spPr>
+        <p:txBody xmlns:a="http://schemas.openxmlformats.org/drawingml/2006/main">
+          <a:bodyPr/>
+          <a:p/>
+        </p:txBody>
       </p:sp>
       <p:sp>
         <p:nvSpPr>
@@ -18943,6 +19251,10 @@
             <a:prstDash val="solid"/>
           </a:ln>
         </p:spPr>
+        <p:txBody xmlns:a="http://schemas.openxmlformats.org/drawingml/2006/main">
+          <a:bodyPr/>
+          <a:p/>
+        </p:txBody>
       </p:sp>
       <p:sp>
         <p:nvSpPr>
@@ -19361,6 +19673,10 @@
             <a:prstDash val="solid"/>
           </a:ln>
         </p:spPr>
+        <p:txBody xmlns:a="http://schemas.openxmlformats.org/drawingml/2006/main">
+          <a:bodyPr/>
+          <a:p/>
+        </p:txBody>
       </p:sp>
       <p:sp>
         <p:nvSpPr>
@@ -19516,6 +19832,10 @@
             <a:prstDash val="solid"/>
           </a:ln>
         </p:spPr>
+        <p:txBody xmlns:a="http://schemas.openxmlformats.org/drawingml/2006/main">
+          <a:bodyPr/>
+          <a:p/>
+        </p:txBody>
       </p:sp>
       <p:sp>
         <p:nvSpPr>
@@ -19613,6 +19933,10 @@
             <a:prstDash val="solid"/>
           </a:ln>
         </p:spPr>
+        <p:txBody xmlns:a="http://schemas.openxmlformats.org/drawingml/2006/main">
+          <a:bodyPr/>
+          <a:p/>
+        </p:txBody>
       </p:sp>
       <p:sp>
         <p:nvSpPr>
@@ -19710,6 +20034,10 @@
             <a:prstDash val="solid"/>
           </a:ln>
         </p:spPr>
+        <p:txBody xmlns:a="http://schemas.openxmlformats.org/drawingml/2006/main">
+          <a:bodyPr/>
+          <a:p/>
+        </p:txBody>
       </p:sp>
       <p:sp>
         <p:nvSpPr>
@@ -19993,6 +20321,10 @@
             <a:prstDash val="solid"/>
           </a:ln>
         </p:spPr>
+        <p:txBody xmlns:a="http://schemas.openxmlformats.org/drawingml/2006/main">
+          <a:bodyPr/>
+          <a:p/>
+        </p:txBody>
       </p:sp>
       <p:sp>
         <p:nvSpPr>
@@ -20276,6 +20608,10 @@
             <a:prstDash val="solid"/>
           </a:ln>
         </p:spPr>
+        <p:txBody xmlns:a="http://schemas.openxmlformats.org/drawingml/2006/main">
+          <a:bodyPr/>
+          <a:p/>
+        </p:txBody>
       </p:sp>
       <p:sp>
         <p:nvSpPr>
@@ -20559,6 +20895,10 @@
             <a:prstDash val="solid"/>
           </a:ln>
         </p:spPr>
+        <p:txBody xmlns:a="http://schemas.openxmlformats.org/drawingml/2006/main">
+          <a:bodyPr/>
+          <a:p/>
+        </p:txBody>
       </p:sp>
       <p:sp>
         <p:nvSpPr>
@@ -20869,6 +21209,10 @@
             <a:prstDash val="solid"/>
           </a:ln>
         </p:spPr>
+        <p:txBody xmlns:a="http://schemas.openxmlformats.org/drawingml/2006/main">
+          <a:bodyPr/>
+          <a:p/>
+        </p:txBody>
       </p:sp>
       <p:sp>
         <p:nvSpPr>
@@ -21305,6 +21649,10 @@
             <a:prstDash val="solid"/>
           </a:ln>
         </p:spPr>
+        <p:txBody xmlns:a="http://schemas.openxmlformats.org/drawingml/2006/main">
+          <a:bodyPr/>
+          <a:p/>
+        </p:txBody>
       </p:sp>
       <p:sp>
         <p:nvSpPr>
@@ -21460,6 +21808,10 @@
             <a:prstDash val="solid"/>
           </a:ln>
         </p:spPr>
+        <p:txBody xmlns:a="http://schemas.openxmlformats.org/drawingml/2006/main">
+          <a:bodyPr/>
+          <a:p/>
+        </p:txBody>
       </p:sp>
       <p:sp>
         <p:nvSpPr>
@@ -21580,7 +21932,7 @@
                 <a:ea typeface="IBM Plex Sans KR"/>
                 <a:cs typeface="IBM Plex Sans KR"/>
               </a:rPr>
-              <a:t>교과서 02-1 · 3쪽</a:t>
+              <a:t>교과서 02-1 · 3–4쪽</a:t>
             </a:r>
           </a:p>
         </p:txBody>
@@ -21617,6 +21969,10 @@
             <a:prstDash val="solid"/>
           </a:ln>
         </p:spPr>
+        <p:txBody xmlns:a="http://schemas.openxmlformats.org/drawingml/2006/main">
+          <a:bodyPr/>
+          <a:p/>
+        </p:txBody>
       </p:sp>
       <p:sp>
         <p:nvSpPr>
@@ -21878,6 +22234,10 @@
             <a:prstDash val="solid"/>
           </a:ln>
         </p:spPr>
+        <p:txBody xmlns:a="http://schemas.openxmlformats.org/drawingml/2006/main">
+          <a:bodyPr/>
+          <a:p/>
+        </p:txBody>
       </p:sp>
       <p:sp>
         <p:nvSpPr>
@@ -22196,6 +22556,10 @@
             <a:prstDash val="solid"/>
           </a:ln>
         </p:spPr>
+        <p:txBody xmlns:a="http://schemas.openxmlformats.org/drawingml/2006/main">
+          <a:bodyPr/>
+          <a:p/>
+        </p:txBody>
       </p:sp>
       <p:sp>
         <p:nvSpPr>
@@ -22493,6 +22857,10 @@
             <a:prstDash val="solid"/>
           </a:ln>
         </p:spPr>
+        <p:txBody xmlns:a="http://schemas.openxmlformats.org/drawingml/2006/main">
+          <a:bodyPr/>
+          <a:p/>
+        </p:txBody>
       </p:sp>
       <p:sp>
         <p:nvSpPr>
@@ -22648,6 +23016,10 @@
             <a:prstDash val="solid"/>
           </a:ln>
         </p:spPr>
+        <p:txBody xmlns:a="http://schemas.openxmlformats.org/drawingml/2006/main">
+          <a:bodyPr/>
+          <a:p/>
+        </p:txBody>
       </p:sp>
       <p:sp>
         <p:nvSpPr>
@@ -22745,6 +23117,10 @@
             <a:prstDash val="solid"/>
           </a:ln>
         </p:spPr>
+        <p:txBody xmlns:a="http://schemas.openxmlformats.org/drawingml/2006/main">
+          <a:bodyPr/>
+          <a:p/>
+        </p:txBody>
       </p:sp>
       <p:sp>
         <p:nvSpPr>
@@ -22900,6 +23276,10 @@
             <a:prstDash val="solid"/>
           </a:ln>
         </p:spPr>
+        <p:txBody xmlns:a="http://schemas.openxmlformats.org/drawingml/2006/main">
+          <a:bodyPr/>
+          <a:p/>
+        </p:txBody>
       </p:sp>
       <p:sp>
         <p:nvSpPr>
@@ -23171,7 +23551,7 @@
                 <a:ea typeface="IBM Plex Sans KR"/>
                 <a:cs typeface="IBM Plex Sans KR"/>
               </a:rPr>
-              <a:t>교과서 02-1 · 4쪽</a:t>
+              <a:t>교과서 02-1 · 5쪽</a:t>
             </a:r>
           </a:p>
         </p:txBody>
@@ -23328,6 +23708,10 @@
             <a:prstDash val="solid"/>
           </a:ln>
         </p:spPr>
+        <p:txBody xmlns:a="http://schemas.openxmlformats.org/drawingml/2006/main">
+          <a:bodyPr/>
+          <a:p/>
+        </p:txBody>
       </p:sp>
       <p:sp>
         <p:nvSpPr>
@@ -23483,6 +23867,10 @@
             <a:prstDash val="solid"/>
           </a:ln>
         </p:spPr>
+        <p:txBody xmlns:a="http://schemas.openxmlformats.org/drawingml/2006/main">
+          <a:bodyPr/>
+          <a:p/>
+        </p:txBody>
       </p:sp>
       <p:sp>
         <p:nvSpPr>
@@ -23580,6 +23968,10 @@
             <a:prstDash val="solid"/>
           </a:ln>
         </p:spPr>
+        <p:txBody xmlns:a="http://schemas.openxmlformats.org/drawingml/2006/main">
+          <a:bodyPr/>
+          <a:p/>
+        </p:txBody>
       </p:sp>
       <p:sp>
         <p:nvSpPr>
@@ -23735,6 +24127,10 @@
             <a:prstDash val="solid"/>
           </a:ln>
         </p:spPr>
+        <p:txBody xmlns:a="http://schemas.openxmlformats.org/drawingml/2006/main">
+          <a:bodyPr/>
+          <a:p/>
+        </p:txBody>
       </p:sp>
       <p:sp>
         <p:nvSpPr>
@@ -23979,7 +24375,7 @@
                 <a:ea typeface="IBM Plex Sans KR"/>
                 <a:cs typeface="IBM Plex Sans KR"/>
               </a:rPr>
-              <a:t>교과서 02-1 · 5쪽</a:t>
+              <a:t>교과서 02-1 · 6쪽</a:t>
             </a:r>
           </a:p>
         </p:txBody>
@@ -24136,6 +24532,10 @@
             <a:prstDash val="solid"/>
           </a:ln>
         </p:spPr>
+        <p:txBody xmlns:a="http://schemas.openxmlformats.org/drawingml/2006/main">
+          <a:bodyPr/>
+          <a:p/>
+        </p:txBody>
       </p:sp>
       <p:sp>
         <p:nvSpPr>
@@ -24291,6 +24691,10 @@
             <a:prstDash val="solid"/>
           </a:ln>
         </p:spPr>
+        <p:txBody xmlns:a="http://schemas.openxmlformats.org/drawingml/2006/main">
+          <a:bodyPr/>
+          <a:p/>
+        </p:txBody>
       </p:sp>
       <p:sp>
         <p:nvSpPr>
@@ -24473,7 +24877,7 @@
                 <a:ea typeface="IBM Plex Sans KR"/>
                 <a:cs typeface="IBM Plex Sans KR"/>
               </a:rPr>
-              <a:t>교과서 02-1 · 5쪽</a:t>
+              <a:t>교과서 02-1 · 6쪽</a:t>
             </a:r>
           </a:p>
         </p:txBody>
@@ -24510,6 +24914,10 @@
             <a:prstDash val="solid"/>
           </a:ln>
         </p:spPr>
+        <p:txBody xmlns:a="http://schemas.openxmlformats.org/drawingml/2006/main">
+          <a:bodyPr/>
+          <a:p/>
+        </p:txBody>
       </p:sp>
       <p:sp>
         <p:nvSpPr>
@@ -24738,6 +25146,10 @@
             <a:prstDash val="solid"/>
           </a:ln>
         </p:spPr>
+        <p:txBody xmlns:a="http://schemas.openxmlformats.org/drawingml/2006/main">
+          <a:bodyPr/>
+          <a:p/>
+        </p:txBody>
       </p:sp>
       <p:sp>
         <p:nvSpPr>
@@ -25059,6 +25471,10 @@
             <a:prstDash val="solid"/>
           </a:ln>
         </p:spPr>
+        <p:txBody xmlns:a="http://schemas.openxmlformats.org/drawingml/2006/main">
+          <a:bodyPr/>
+          <a:p/>
+        </p:txBody>
       </p:sp>
       <p:sp>
         <p:nvSpPr>
@@ -25214,6 +25630,10 @@
             <a:prstDash val="solid"/>
           </a:ln>
         </p:spPr>
+        <p:txBody xmlns:a="http://schemas.openxmlformats.org/drawingml/2006/main">
+          <a:bodyPr/>
+          <a:p/>
+        </p:txBody>
       </p:sp>
       <p:sp>
         <p:nvSpPr>
@@ -25311,6 +25731,10 @@
             <a:prstDash val="solid"/>
           </a:ln>
         </p:spPr>
+        <p:txBody xmlns:a="http://schemas.openxmlformats.org/drawingml/2006/main">
+          <a:bodyPr/>
+          <a:p/>
+        </p:txBody>
       </p:sp>
       <p:sp>
         <p:nvSpPr>
@@ -25520,6 +25944,10 @@
             <a:prstDash val="solid"/>
           </a:ln>
         </p:spPr>
+        <p:txBody xmlns:a="http://schemas.openxmlformats.org/drawingml/2006/main">
+          <a:bodyPr/>
+          <a:p/>
+        </p:txBody>
       </p:sp>
       <p:sp>
         <p:nvSpPr>
@@ -25764,7 +26192,7 @@
                 <a:ea typeface="IBM Plex Sans KR"/>
                 <a:cs typeface="IBM Plex Sans KR"/>
               </a:rPr>
-              <a:t>교과서 02-1 · 6쪽</a:t>
+              <a:t>교과서 02-1 · 7쪽</a:t>
             </a:r>
           </a:p>
         </p:txBody>

--- a/02/ppt/02-1_개발_도구_설치와_확인_v2.pptx
+++ b/02/ppt/02-1_개발_도구_설치와_확인_v2.pptx
@@ -1031,7 +1031,7 @@
           </a:p>
           <a:p xmlns:a="http://schemas.openxmlformats.org/drawingml/2006/main">
             <a:r>
-              <a:t>2. True인 학생만 교과서 10쪽 복사 버튼으로 아래 명령을 실행한다. C:\Users\student... 같은 고정 경로를 직접 적지 않는다. 실제 npm 경로를 읽고 이미 PATH에 있으면 중복 추가하지 않는다.</a:t>
+              <a:t>2. True인 학생만 교과서 12쪽 복사 버튼으로 아래 명령을 실행한다. C:\Users\student... 같은 고정 경로를 직접 적지 않는다. 실제 npm 경로를 읽고 이미 PATH에 있으면 중복 추가하지 않는다.</a:t>
             </a:r>
           </a:p>
           <a:p xmlns:a="http://schemas.openxmlformats.org/drawingml/2006/main">
@@ -1136,7 +1136,7 @@
           </a:p>
           <a:p xmlns:a="http://schemas.openxmlformats.org/drawingml/2006/main">
             <a:r>
-              <a:t>화면에 ‘running scripts is disabled’ 또는 ‘npm.ps1 cannot be loaded’가 실제로 보일 때만 교과서 11쪽의 Set-ExecutionPolicy -Scope CurrentUser -ExecutionPolicy RemoteSigned를 사용한다. CommandNotFoundException에는 이 명령을 사용하지 않는다.</a:t>
+              <a:t>화면에 ‘running scripts is disabled’ 또는 ‘npm.ps1 cannot be loaded’가 실제로 보일 때만 교과서 13쪽의 Set-ExecutionPolicy -Scope CurrentUser -ExecutionPolicy RemoteSigned를 사용한다. CommandNotFoundException에는 이 명령을 사용하지 않는다.</a:t>
             </a:r>
           </a:p>
           <a:p xmlns:a="http://schemas.openxmlformats.org/drawingml/2006/main">
@@ -4522,7 +4522,7 @@
                 <a:ea typeface="IBM Plex Sans KR"/>
                 <a:cs typeface="IBM Plex Sans KR"/>
               </a:rPr>
-              <a:t>교과서 02-1 · 8쪽</a:t>
+              <a:t>교과서 02-1 · 9–10쪽</a:t>
             </a:r>
           </a:p>
         </p:txBody>
@@ -5400,7 +5400,7 @@
                 <a:ea typeface="IBM Plex Sans KR"/>
                 <a:cs typeface="IBM Plex Sans KR"/>
               </a:rPr>
-              <a:t>교과서 02-1 · 8쪽</a:t>
+              <a:t>교과서 02-1 · 9–10쪽</a:t>
             </a:r>
           </a:p>
         </p:txBody>
@@ -6224,7 +6224,7 @@
                 <a:ea typeface="IBM Plex Sans KR"/>
                 <a:cs typeface="IBM Plex Sans KR"/>
               </a:rPr>
-              <a:t>교과서 02-1 · 9쪽</a:t>
+              <a:t>교과서 02-1 · 11쪽</a:t>
             </a:r>
           </a:p>
         </p:txBody>
@@ -7075,7 +7075,7 @@
                 <a:ea typeface="IBM Plex Sans KR"/>
                 <a:cs typeface="IBM Plex Sans KR"/>
               </a:rPr>
-              <a:t>교과서 02-1 · 9쪽</a:t>
+              <a:t>교과서 02-1 · 11쪽</a:t>
             </a:r>
           </a:p>
         </p:txBody>
@@ -7899,7 +7899,7 @@
                 <a:ea typeface="IBM Plex Sans KR"/>
                 <a:cs typeface="IBM Plex Sans KR"/>
               </a:rPr>
-              <a:t>교과서 02-1 · 10쪽</a:t>
+              <a:t>교과서 02-1 · 12쪽</a:t>
             </a:r>
           </a:p>
         </p:txBody>
@@ -9249,7 +9249,7 @@
                 <a:ea typeface="IBM Plex Sans KR"/>
                 <a:cs typeface="IBM Plex Sans KR"/>
               </a:rPr>
-              <a:t>교과서 02-1 · 11–12쪽</a:t>
+              <a:t>교과서 02-1 · 13–14쪽</a:t>
             </a:r>
           </a:p>
         </p:txBody>
@@ -10046,7 +10046,7 @@
                 <a:ea typeface="IBM Plex Sans KR"/>
                 <a:cs typeface="IBM Plex Sans KR"/>
               </a:rPr>
-              <a:t>교과서 02-1 · 13쪽</a:t>
+              <a:t>교과서 02-1 · 15쪽</a:t>
             </a:r>
           </a:p>
         </p:txBody>
@@ -10920,7 +10920,7 @@
                 <a:ea typeface="IBM Plex Sans KR"/>
                 <a:cs typeface="IBM Plex Sans KR"/>
               </a:rPr>
-              <a:t>교과서 02-1 · 14쪽</a:t>
+              <a:t>교과서 02-1 · 16쪽</a:t>
             </a:r>
           </a:p>
         </p:txBody>
@@ -11744,7 +11744,7 @@
                 <a:ea typeface="IBM Plex Sans KR"/>
                 <a:cs typeface="IBM Plex Sans KR"/>
               </a:rPr>
-              <a:t>교과서 02-1 · 15쪽</a:t>
+              <a:t>교과서 02-1 · 17–18쪽</a:t>
             </a:r>
           </a:p>
         </p:txBody>
@@ -12622,7 +12622,7 @@
                 <a:ea typeface="IBM Plex Sans KR"/>
                 <a:cs typeface="IBM Plex Sans KR"/>
               </a:rPr>
-              <a:t>교과서 02-1 · 15쪽</a:t>
+              <a:t>교과서 02-1 · 17–18쪽</a:t>
             </a:r>
           </a:p>
         </p:txBody>
@@ -14435,7 +14435,7 @@
                 <a:ea typeface="IBM Plex Sans KR"/>
                 <a:cs typeface="IBM Plex Sans KR"/>
               </a:rPr>
-              <a:t>교과서 02-1 · 16쪽</a:t>
+              <a:t>교과서 02-1 · 19–20쪽</a:t>
             </a:r>
           </a:p>
         </p:txBody>
@@ -14848,7 +14848,7 @@
                 <a:ea typeface="IBM Plex Sans KR"/>
                 <a:cs typeface="IBM Plex Sans KR"/>
               </a:rPr>
-              <a:t>교과서 02-1 · 16쪽</a:t>
+              <a:t>교과서 02-1 · 19–20쪽</a:t>
             </a:r>
           </a:p>
         </p:txBody>
@@ -15576,7 +15576,7 @@
                 <a:ea typeface="IBM Plex Sans KR"/>
                 <a:cs typeface="IBM Plex Sans KR"/>
               </a:rPr>
-              <a:t>교과서 02-1 · 17쪽</a:t>
+              <a:t>교과서 02-1 · 21쪽</a:t>
             </a:r>
           </a:p>
         </p:txBody>
@@ -16334,7 +16334,7 @@
                 <a:ea typeface="IBM Plex Sans KR"/>
                 <a:cs typeface="IBM Plex Sans KR"/>
               </a:rPr>
-              <a:t>교과서 02-1 · 17쪽</a:t>
+              <a:t>교과서 02-1 · 21쪽</a:t>
             </a:r>
           </a:p>
         </p:txBody>
@@ -17890,7 +17890,7 @@
                 <a:ea typeface="IBM Plex Sans KR"/>
                 <a:cs typeface="IBM Plex Sans KR"/>
               </a:rPr>
-              <a:t>교과서 02-1 · 18쪽</a:t>
+              <a:t>교과서 02-1 · 22쪽</a:t>
             </a:r>
           </a:p>
         </p:txBody>
@@ -18962,7 +18962,7 @@
                 <a:ea typeface="IBM Plex Sans KR"/>
                 <a:cs typeface="IBM Plex Sans KR"/>
               </a:rPr>
-              <a:t>교과서 02-1 · 19쪽</a:t>
+              <a:t>교과서 02-1 · 23쪽</a:t>
             </a:r>
           </a:p>
         </p:txBody>
@@ -26192,7 +26192,7 @@
                 <a:ea typeface="IBM Plex Sans KR"/>
                 <a:cs typeface="IBM Plex Sans KR"/>
               </a:rPr>
-              <a:t>교과서 02-1 · 7쪽</a:t>
+              <a:t>교과서 02-1 · 7–8쪽</a:t>
             </a:r>
           </a:p>
         </p:txBody>
